--- a/Advanced Reactor Materials/Fall2025/Lec1_intro.pptx
+++ b/Advanced Reactor Materials/Fall2025/Lec1_intro.pptx
@@ -278,7 +278,7 @@
           <a:p>
             <a:fld id="{7D8C8CBE-5833-3E4A-B056-894CFF8CC29A}" type="datetimeFigureOut">
               <a:rPr lang="en-US" smtClean="0"/>
-              <a:t>8/8/25</a:t>
+              <a:t>8/13/25</a:t>
             </a:fld>
             <a:endParaRPr lang="en-US"/>
           </a:p>
@@ -476,7 +476,7 @@
           <a:p>
             <a:fld id="{7D8C8CBE-5833-3E4A-B056-894CFF8CC29A}" type="datetimeFigureOut">
               <a:rPr lang="en-US" smtClean="0"/>
-              <a:t>8/8/25</a:t>
+              <a:t>8/13/25</a:t>
             </a:fld>
             <a:endParaRPr lang="en-US"/>
           </a:p>
@@ -684,7 +684,7 @@
           <a:p>
             <a:fld id="{7D8C8CBE-5833-3E4A-B056-894CFF8CC29A}" type="datetimeFigureOut">
               <a:rPr lang="en-US" smtClean="0"/>
-              <a:t>8/8/25</a:t>
+              <a:t>8/13/25</a:t>
             </a:fld>
             <a:endParaRPr lang="en-US"/>
           </a:p>
@@ -948,7 +948,7 @@
               <a:pPr>
                 <a:defRPr/>
               </a:pPr>
-              <a:t>8/8/25</a:t>
+              <a:t>8/13/25</a:t>
             </a:fld>
             <a:endParaRPr lang="en-US"/>
           </a:p>
@@ -1150,7 +1150,7 @@
               <a:pPr>
                 <a:defRPr/>
               </a:pPr>
-              <a:t>8/8/25</a:t>
+              <a:t>8/13/25</a:t>
             </a:fld>
             <a:endParaRPr lang="en-US"/>
           </a:p>
@@ -1423,7 +1423,7 @@
               <a:pPr>
                 <a:defRPr/>
               </a:pPr>
-              <a:t>8/8/25</a:t>
+              <a:t>8/13/25</a:t>
             </a:fld>
             <a:endParaRPr lang="en-US"/>
           </a:p>
@@ -1737,7 +1737,7 @@
               <a:pPr>
                 <a:defRPr/>
               </a:pPr>
-              <a:t>8/8/25</a:t>
+              <a:t>8/13/25</a:t>
             </a:fld>
             <a:endParaRPr lang="en-US"/>
           </a:p>
@@ -2060,7 +2060,7 @@
               <a:pPr>
                 <a:defRPr/>
               </a:pPr>
-              <a:t>8/8/25</a:t>
+              <a:t>8/13/25</a:t>
             </a:fld>
             <a:endParaRPr lang="en-US"/>
           </a:p>
@@ -2204,7 +2204,7 @@
               <a:pPr>
                 <a:defRPr/>
               </a:pPr>
-              <a:t>8/8/25</a:t>
+              <a:t>8/13/25</a:t>
             </a:fld>
             <a:endParaRPr lang="en-US"/>
           </a:p>
@@ -2326,7 +2326,7 @@
               <a:pPr>
                 <a:defRPr/>
               </a:pPr>
-              <a:t>8/8/25</a:t>
+              <a:t>8/13/25</a:t>
             </a:fld>
             <a:endParaRPr lang="en-US"/>
           </a:p>
@@ -2628,7 +2628,7 @@
               <a:pPr>
                 <a:defRPr/>
               </a:pPr>
-              <a:t>8/8/25</a:t>
+              <a:t>8/13/25</a:t>
             </a:fld>
             <a:endParaRPr lang="en-US"/>
           </a:p>
@@ -2831,7 +2831,7 @@
           <a:p>
             <a:fld id="{7D8C8CBE-5833-3E4A-B056-894CFF8CC29A}" type="datetimeFigureOut">
               <a:rPr lang="en-US" smtClean="0"/>
-              <a:t>8/8/25</a:t>
+              <a:t>8/13/25</a:t>
             </a:fld>
             <a:endParaRPr lang="en-US"/>
           </a:p>
@@ -3113,7 +3113,7 @@
               <a:pPr>
                 <a:defRPr/>
               </a:pPr>
-              <a:t>8/8/25</a:t>
+              <a:t>8/13/25</a:t>
             </a:fld>
             <a:endParaRPr lang="en-US"/>
           </a:p>
@@ -3309,7 +3309,7 @@
               <a:pPr>
                 <a:defRPr/>
               </a:pPr>
-              <a:t>8/8/25</a:t>
+              <a:t>8/13/25</a:t>
             </a:fld>
             <a:endParaRPr lang="en-US"/>
           </a:p>
@@ -3514,7 +3514,7 @@
               <a:pPr>
                 <a:defRPr/>
               </a:pPr>
-              <a:t>8/8/25</a:t>
+              <a:t>8/13/25</a:t>
             </a:fld>
             <a:endParaRPr lang="en-US"/>
           </a:p>
@@ -3794,7 +3794,7 @@
           <a:p>
             <a:fld id="{7D8C8CBE-5833-3E4A-B056-894CFF8CC29A}" type="datetimeFigureOut">
               <a:rPr lang="en-US" smtClean="0"/>
-              <a:t>8/8/25</a:t>
+              <a:t>8/13/25</a:t>
             </a:fld>
             <a:endParaRPr lang="en-US"/>
           </a:p>
@@ -4059,7 +4059,7 @@
           <a:p>
             <a:fld id="{7D8C8CBE-5833-3E4A-B056-894CFF8CC29A}" type="datetimeFigureOut">
               <a:rPr lang="en-US" smtClean="0"/>
-              <a:t>8/8/25</a:t>
+              <a:t>8/13/25</a:t>
             </a:fld>
             <a:endParaRPr lang="en-US"/>
           </a:p>
@@ -4471,7 +4471,7 @@
           <a:p>
             <a:fld id="{7D8C8CBE-5833-3E4A-B056-894CFF8CC29A}" type="datetimeFigureOut">
               <a:rPr lang="en-US" smtClean="0"/>
-              <a:t>8/8/25</a:t>
+              <a:t>8/13/25</a:t>
             </a:fld>
             <a:endParaRPr lang="en-US"/>
           </a:p>
@@ -4612,7 +4612,7 @@
           <a:p>
             <a:fld id="{7D8C8CBE-5833-3E4A-B056-894CFF8CC29A}" type="datetimeFigureOut">
               <a:rPr lang="en-US" smtClean="0"/>
-              <a:t>8/8/25</a:t>
+              <a:t>8/13/25</a:t>
             </a:fld>
             <a:endParaRPr lang="en-US"/>
           </a:p>
@@ -4725,7 +4725,7 @@
           <a:p>
             <a:fld id="{7D8C8CBE-5833-3E4A-B056-894CFF8CC29A}" type="datetimeFigureOut">
               <a:rPr lang="en-US" smtClean="0"/>
-              <a:t>8/8/25</a:t>
+              <a:t>8/13/25</a:t>
             </a:fld>
             <a:endParaRPr lang="en-US"/>
           </a:p>
@@ -5036,7 +5036,7 @@
           <a:p>
             <a:fld id="{7D8C8CBE-5833-3E4A-B056-894CFF8CC29A}" type="datetimeFigureOut">
               <a:rPr lang="en-US" smtClean="0"/>
-              <a:t>8/8/25</a:t>
+              <a:t>8/13/25</a:t>
             </a:fld>
             <a:endParaRPr lang="en-US"/>
           </a:p>
@@ -5324,7 +5324,7 @@
           <a:p>
             <a:fld id="{7D8C8CBE-5833-3E4A-B056-894CFF8CC29A}" type="datetimeFigureOut">
               <a:rPr lang="en-US" smtClean="0"/>
-              <a:t>8/8/25</a:t>
+              <a:t>8/13/25</a:t>
             </a:fld>
             <a:endParaRPr lang="en-US"/>
           </a:p>
@@ -5565,7 +5565,7 @@
           <a:p>
             <a:fld id="{7D8C8CBE-5833-3E4A-B056-894CFF8CC29A}" type="datetimeFigureOut">
               <a:rPr lang="en-US" smtClean="0"/>
-              <a:t>8/8/25</a:t>
+              <a:t>8/13/25</a:t>
             </a:fld>
             <a:endParaRPr lang="en-US"/>
           </a:p>
@@ -6011,14 +6011,14 @@
           </a:ln>
           <a:extLst>
             <a:ext uri="{909E8E84-426E-40dd-AFC4-6F175D3DCCD1}">
-              <a14:hiddenFill xmlns:a14="http://schemas.microsoft.com/office/drawing/2010/main" xmlns="">
+              <a14:hiddenFill xmlns="" xmlns:a14="http://schemas.microsoft.com/office/drawing/2010/main">
                 <a:solidFill>
                   <a:srgbClr val="FFFFFF"/>
                 </a:solidFill>
               </a14:hiddenFill>
             </a:ext>
             <a:ext uri="{91240B29-F687-4f45-9708-019B960494DF}">
-              <a14:hiddenLine xmlns:a14="http://schemas.microsoft.com/office/drawing/2010/main" xmlns="" w="9525">
+              <a14:hiddenLine xmlns="" xmlns:a14="http://schemas.microsoft.com/office/drawing/2010/main" w="9525">
                 <a:solidFill>
                   <a:srgbClr val="000000"/>
                 </a:solidFill>
@@ -6028,7 +6028,7 @@
               </a14:hiddenLine>
             </a:ext>
             <a:ext uri="{FAA26D3D-D897-4be2-8F04-BA451C77F1D7}">
-              <ma14:placeholderFlag xmlns:ma14="http://schemas.microsoft.com/office/mac/drawingml/2011/main" xmlns="" val="1"/>
+              <ma14:placeholderFlag xmlns="" xmlns:ma14="http://schemas.microsoft.com/office/mac/drawingml/2011/main" val="1"/>
             </a:ext>
           </a:extLst>
         </p:spPr>
@@ -6079,14 +6079,14 @@
           </a:ln>
           <a:extLst>
             <a:ext uri="{909E8E84-426E-40dd-AFC4-6F175D3DCCD1}">
-              <a14:hiddenFill xmlns:a14="http://schemas.microsoft.com/office/drawing/2010/main" xmlns="">
+              <a14:hiddenFill xmlns="" xmlns:a14="http://schemas.microsoft.com/office/drawing/2010/main">
                 <a:solidFill>
                   <a:srgbClr val="FFFFFF"/>
                 </a:solidFill>
               </a14:hiddenFill>
             </a:ext>
             <a:ext uri="{91240B29-F687-4f45-9708-019B960494DF}">
-              <a14:hiddenLine xmlns:a14="http://schemas.microsoft.com/office/drawing/2010/main" xmlns="" w="9525">
+              <a14:hiddenLine xmlns="" xmlns:a14="http://schemas.microsoft.com/office/drawing/2010/main" w="9525">
                 <a:solidFill>
                   <a:srgbClr val="000000"/>
                 </a:solidFill>
@@ -6096,7 +6096,7 @@
               </a14:hiddenLine>
             </a:ext>
             <a:ext uri="{FAA26D3D-D897-4be2-8F04-BA451C77F1D7}">
-              <ma14:placeholderFlag xmlns:ma14="http://schemas.microsoft.com/office/mac/drawingml/2011/main" xmlns="" val="1"/>
+              <ma14:placeholderFlag xmlns="" xmlns:ma14="http://schemas.microsoft.com/office/mac/drawingml/2011/main" val="1"/>
             </a:ext>
           </a:extLst>
         </p:spPr>
@@ -6195,7 +6195,7 @@
               <a:pPr>
                 <a:defRPr/>
               </a:pPr>
-              <a:t>8/8/25</a:t>
+              <a:t>8/13/25</a:t>
             </a:fld>
             <a:endParaRPr lang="en-US" dirty="0"/>
           </a:p>
@@ -8450,18 +8450,13 @@
           <a:p>
             <a:r>
               <a:rPr lang="en-US" sz="2400" dirty="0"/>
-              <a:t>All slides, and probably videos, will be available on </a:t>
-            </a:r>
-            <a:r>
-              <a:rPr lang="en-US" sz="2400" dirty="0" err="1"/>
-              <a:t>moodle</a:t>
-            </a:r>
-            <a:endParaRPr lang="en-US" sz="2400" dirty="0"/>
+              <a:t>All slides will be available on Moodle</a:t>
+            </a:r>
           </a:p>
           <a:p>
             <a:r>
               <a:rPr lang="en-US" sz="2400" dirty="0"/>
-              <a:t>I have a Zoom classroom set up to do simulcasting and redundant recording</a:t>
+              <a:t>I have a Zoom classroom set up to do simulcasting</a:t>
             </a:r>
           </a:p>
           <a:p>
@@ -8569,13 +8564,25 @@
           <a:p>
             <a:r>
               <a:rPr lang="en-US" sz="2400" dirty="0"/>
-              <a:t>Four quizzes will be conducted during normal class hours – 20% each</a:t>
+              <a:t>Four exams will be conducted during normal class hours – 20% each</a:t>
+            </a:r>
+          </a:p>
+          <a:p>
+            <a:r>
+              <a:rPr lang="en-US" sz="2400" dirty="0"/>
+              <a:t>Will set up an exam period via zoom for distance students</a:t>
             </a:r>
           </a:p>
           <a:p>
             <a:r>
               <a:rPr lang="en-US" sz="2400" dirty="0"/>
               <a:t>One project presentation will be via PPT and conducted during normal class hours – 20%</a:t>
+            </a:r>
+          </a:p>
+          <a:p>
+            <a:r>
+              <a:rPr lang="en-US" sz="2400" dirty="0"/>
+              <a:t>Distance will upload recorded presentation</a:t>
             </a:r>
           </a:p>
           <a:p>
@@ -8687,6 +8694,13 @@
             <a:r>
               <a:rPr lang="en-US" sz="2400" dirty="0"/>
               <a:t>Don’t hesitate to schedule these</a:t>
+            </a:r>
+          </a:p>
+          <a:p>
+            <a:pPr lvl="1"/>
+            <a:r>
+              <a:rPr lang="en-US" sz="2400" dirty="0"/>
+              <a:t>If I don’t know you need help, then I can’t help</a:t>
             </a:r>
           </a:p>
         </p:txBody>
@@ -8955,7 +8969,7 @@
               </a14:hiddenLine>
             </a:ext>
             <a:ext uri="{FAA26D3D-D897-4be2-8F04-BA451C77F1D7}">
-              <ma14:placeholderFlag xmlns:ma14="http://schemas.microsoft.com/office/mac/drawingml/2011/main" xmlns="" val="1"/>
+              <ma14:placeholderFlag xmlns="" xmlns:ma14="http://schemas.microsoft.com/office/mac/drawingml/2011/main" val="1"/>
             </a:ext>
           </a:extLst>
         </p:spPr>

--- a/Advanced Reactor Materials/Fall2025/Lec1_intro.pptx
+++ b/Advanced Reactor Materials/Fall2025/Lec1_intro.pptx
@@ -13,18 +13,19 @@
     <p:sldId id="273" r:id="rId7"/>
     <p:sldId id="409" r:id="rId8"/>
     <p:sldId id="407" r:id="rId9"/>
-    <p:sldId id="397" r:id="rId10"/>
-    <p:sldId id="400" r:id="rId11"/>
-    <p:sldId id="399" r:id="rId12"/>
-    <p:sldId id="404" r:id="rId13"/>
-    <p:sldId id="401" r:id="rId14"/>
-    <p:sldId id="412" r:id="rId15"/>
-    <p:sldId id="403" r:id="rId16"/>
-    <p:sldId id="402" r:id="rId17"/>
-    <p:sldId id="413" r:id="rId18"/>
-    <p:sldId id="405" r:id="rId19"/>
-    <p:sldId id="406" r:id="rId20"/>
-    <p:sldId id="395" r:id="rId21"/>
+    <p:sldId id="415" r:id="rId10"/>
+    <p:sldId id="397" r:id="rId11"/>
+    <p:sldId id="400" r:id="rId12"/>
+    <p:sldId id="399" r:id="rId13"/>
+    <p:sldId id="404" r:id="rId14"/>
+    <p:sldId id="401" r:id="rId15"/>
+    <p:sldId id="412" r:id="rId16"/>
+    <p:sldId id="403" r:id="rId17"/>
+    <p:sldId id="402" r:id="rId18"/>
+    <p:sldId id="413" r:id="rId19"/>
+    <p:sldId id="405" r:id="rId20"/>
+    <p:sldId id="406" r:id="rId21"/>
+    <p:sldId id="395" r:id="rId22"/>
   </p:sldIdLst>
   <p:sldSz cx="12192000" cy="6858000"/>
   <p:notesSz cx="6858000" cy="9144000"/>
@@ -278,7 +279,7 @@
           <a:p>
             <a:fld id="{7D8C8CBE-5833-3E4A-B056-894CFF8CC29A}" type="datetimeFigureOut">
               <a:rPr lang="en-US" smtClean="0"/>
-              <a:t>8/13/25</a:t>
+              <a:t>8/19/25</a:t>
             </a:fld>
             <a:endParaRPr lang="en-US"/>
           </a:p>
@@ -476,7 +477,7 @@
           <a:p>
             <a:fld id="{7D8C8CBE-5833-3E4A-B056-894CFF8CC29A}" type="datetimeFigureOut">
               <a:rPr lang="en-US" smtClean="0"/>
-              <a:t>8/13/25</a:t>
+              <a:t>8/19/25</a:t>
             </a:fld>
             <a:endParaRPr lang="en-US"/>
           </a:p>
@@ -684,7 +685,7 @@
           <a:p>
             <a:fld id="{7D8C8CBE-5833-3E4A-B056-894CFF8CC29A}" type="datetimeFigureOut">
               <a:rPr lang="en-US" smtClean="0"/>
-              <a:t>8/13/25</a:t>
+              <a:t>8/19/25</a:t>
             </a:fld>
             <a:endParaRPr lang="en-US"/>
           </a:p>
@@ -948,7 +949,7 @@
               <a:pPr>
                 <a:defRPr/>
               </a:pPr>
-              <a:t>8/13/25</a:t>
+              <a:t>8/19/25</a:t>
             </a:fld>
             <a:endParaRPr lang="en-US"/>
           </a:p>
@@ -1150,7 +1151,7 @@
               <a:pPr>
                 <a:defRPr/>
               </a:pPr>
-              <a:t>8/13/25</a:t>
+              <a:t>8/19/25</a:t>
             </a:fld>
             <a:endParaRPr lang="en-US"/>
           </a:p>
@@ -1423,7 +1424,7 @@
               <a:pPr>
                 <a:defRPr/>
               </a:pPr>
-              <a:t>8/13/25</a:t>
+              <a:t>8/19/25</a:t>
             </a:fld>
             <a:endParaRPr lang="en-US"/>
           </a:p>
@@ -1737,7 +1738,7 @@
               <a:pPr>
                 <a:defRPr/>
               </a:pPr>
-              <a:t>8/13/25</a:t>
+              <a:t>8/19/25</a:t>
             </a:fld>
             <a:endParaRPr lang="en-US"/>
           </a:p>
@@ -2060,7 +2061,7 @@
               <a:pPr>
                 <a:defRPr/>
               </a:pPr>
-              <a:t>8/13/25</a:t>
+              <a:t>8/19/25</a:t>
             </a:fld>
             <a:endParaRPr lang="en-US"/>
           </a:p>
@@ -2204,7 +2205,7 @@
               <a:pPr>
                 <a:defRPr/>
               </a:pPr>
-              <a:t>8/13/25</a:t>
+              <a:t>8/19/25</a:t>
             </a:fld>
             <a:endParaRPr lang="en-US"/>
           </a:p>
@@ -2326,7 +2327,7 @@
               <a:pPr>
                 <a:defRPr/>
               </a:pPr>
-              <a:t>8/13/25</a:t>
+              <a:t>8/19/25</a:t>
             </a:fld>
             <a:endParaRPr lang="en-US"/>
           </a:p>
@@ -2628,7 +2629,7 @@
               <a:pPr>
                 <a:defRPr/>
               </a:pPr>
-              <a:t>8/13/25</a:t>
+              <a:t>8/19/25</a:t>
             </a:fld>
             <a:endParaRPr lang="en-US"/>
           </a:p>
@@ -2831,7 +2832,7 @@
           <a:p>
             <a:fld id="{7D8C8CBE-5833-3E4A-B056-894CFF8CC29A}" type="datetimeFigureOut">
               <a:rPr lang="en-US" smtClean="0"/>
-              <a:t>8/13/25</a:t>
+              <a:t>8/19/25</a:t>
             </a:fld>
             <a:endParaRPr lang="en-US"/>
           </a:p>
@@ -3113,7 +3114,7 @@
               <a:pPr>
                 <a:defRPr/>
               </a:pPr>
-              <a:t>8/13/25</a:t>
+              <a:t>8/19/25</a:t>
             </a:fld>
             <a:endParaRPr lang="en-US"/>
           </a:p>
@@ -3309,7 +3310,7 @@
               <a:pPr>
                 <a:defRPr/>
               </a:pPr>
-              <a:t>8/13/25</a:t>
+              <a:t>8/19/25</a:t>
             </a:fld>
             <a:endParaRPr lang="en-US"/>
           </a:p>
@@ -3514,7 +3515,7 @@
               <a:pPr>
                 <a:defRPr/>
               </a:pPr>
-              <a:t>8/13/25</a:t>
+              <a:t>8/19/25</a:t>
             </a:fld>
             <a:endParaRPr lang="en-US"/>
           </a:p>
@@ -3794,7 +3795,7 @@
           <a:p>
             <a:fld id="{7D8C8CBE-5833-3E4A-B056-894CFF8CC29A}" type="datetimeFigureOut">
               <a:rPr lang="en-US" smtClean="0"/>
-              <a:t>8/13/25</a:t>
+              <a:t>8/19/25</a:t>
             </a:fld>
             <a:endParaRPr lang="en-US"/>
           </a:p>
@@ -4059,7 +4060,7 @@
           <a:p>
             <a:fld id="{7D8C8CBE-5833-3E4A-B056-894CFF8CC29A}" type="datetimeFigureOut">
               <a:rPr lang="en-US" smtClean="0"/>
-              <a:t>8/13/25</a:t>
+              <a:t>8/19/25</a:t>
             </a:fld>
             <a:endParaRPr lang="en-US"/>
           </a:p>
@@ -4471,7 +4472,7 @@
           <a:p>
             <a:fld id="{7D8C8CBE-5833-3E4A-B056-894CFF8CC29A}" type="datetimeFigureOut">
               <a:rPr lang="en-US" smtClean="0"/>
-              <a:t>8/13/25</a:t>
+              <a:t>8/19/25</a:t>
             </a:fld>
             <a:endParaRPr lang="en-US"/>
           </a:p>
@@ -4612,7 +4613,7 @@
           <a:p>
             <a:fld id="{7D8C8CBE-5833-3E4A-B056-894CFF8CC29A}" type="datetimeFigureOut">
               <a:rPr lang="en-US" smtClean="0"/>
-              <a:t>8/13/25</a:t>
+              <a:t>8/19/25</a:t>
             </a:fld>
             <a:endParaRPr lang="en-US"/>
           </a:p>
@@ -4725,7 +4726,7 @@
           <a:p>
             <a:fld id="{7D8C8CBE-5833-3E4A-B056-894CFF8CC29A}" type="datetimeFigureOut">
               <a:rPr lang="en-US" smtClean="0"/>
-              <a:t>8/13/25</a:t>
+              <a:t>8/19/25</a:t>
             </a:fld>
             <a:endParaRPr lang="en-US"/>
           </a:p>
@@ -5036,7 +5037,7 @@
           <a:p>
             <a:fld id="{7D8C8CBE-5833-3E4A-B056-894CFF8CC29A}" type="datetimeFigureOut">
               <a:rPr lang="en-US" smtClean="0"/>
-              <a:t>8/13/25</a:t>
+              <a:t>8/19/25</a:t>
             </a:fld>
             <a:endParaRPr lang="en-US"/>
           </a:p>
@@ -5324,7 +5325,7 @@
           <a:p>
             <a:fld id="{7D8C8CBE-5833-3E4A-B056-894CFF8CC29A}" type="datetimeFigureOut">
               <a:rPr lang="en-US" smtClean="0"/>
-              <a:t>8/13/25</a:t>
+              <a:t>8/19/25</a:t>
             </a:fld>
             <a:endParaRPr lang="en-US"/>
           </a:p>
@@ -5565,7 +5566,7 @@
           <a:p>
             <a:fld id="{7D8C8CBE-5833-3E4A-B056-894CFF8CC29A}" type="datetimeFigureOut">
               <a:rPr lang="en-US" smtClean="0"/>
-              <a:t>8/13/25</a:t>
+              <a:t>8/19/25</a:t>
             </a:fld>
             <a:endParaRPr lang="en-US"/>
           </a:p>
@@ -6011,14 +6012,14 @@
           </a:ln>
           <a:extLst>
             <a:ext uri="{909E8E84-426E-40dd-AFC4-6F175D3DCCD1}">
-              <a14:hiddenFill xmlns="" xmlns:a14="http://schemas.microsoft.com/office/drawing/2010/main">
+              <a14:hiddenFill xmlns:a14="http://schemas.microsoft.com/office/drawing/2010/main" xmlns="">
                 <a:solidFill>
                   <a:srgbClr val="FFFFFF"/>
                 </a:solidFill>
               </a14:hiddenFill>
             </a:ext>
             <a:ext uri="{91240B29-F687-4f45-9708-019B960494DF}">
-              <a14:hiddenLine xmlns="" xmlns:a14="http://schemas.microsoft.com/office/drawing/2010/main" w="9525">
+              <a14:hiddenLine xmlns:a14="http://schemas.microsoft.com/office/drawing/2010/main" xmlns="" w="9525">
                 <a:solidFill>
                   <a:srgbClr val="000000"/>
                 </a:solidFill>
@@ -6028,7 +6029,7 @@
               </a14:hiddenLine>
             </a:ext>
             <a:ext uri="{FAA26D3D-D897-4be2-8F04-BA451C77F1D7}">
-              <ma14:placeholderFlag xmlns="" xmlns:ma14="http://schemas.microsoft.com/office/mac/drawingml/2011/main" val="1"/>
+              <ma14:placeholderFlag xmlns:ma14="http://schemas.microsoft.com/office/mac/drawingml/2011/main" xmlns="" val="1"/>
             </a:ext>
           </a:extLst>
         </p:spPr>
@@ -6079,14 +6080,14 @@
           </a:ln>
           <a:extLst>
             <a:ext uri="{909E8E84-426E-40dd-AFC4-6F175D3DCCD1}">
-              <a14:hiddenFill xmlns="" xmlns:a14="http://schemas.microsoft.com/office/drawing/2010/main">
+              <a14:hiddenFill xmlns:a14="http://schemas.microsoft.com/office/drawing/2010/main" xmlns="">
                 <a:solidFill>
                   <a:srgbClr val="FFFFFF"/>
                 </a:solidFill>
               </a14:hiddenFill>
             </a:ext>
             <a:ext uri="{91240B29-F687-4f45-9708-019B960494DF}">
-              <a14:hiddenLine xmlns="" xmlns:a14="http://schemas.microsoft.com/office/drawing/2010/main" w="9525">
+              <a14:hiddenLine xmlns:a14="http://schemas.microsoft.com/office/drawing/2010/main" xmlns="" w="9525">
                 <a:solidFill>
                   <a:srgbClr val="000000"/>
                 </a:solidFill>
@@ -6096,7 +6097,7 @@
               </a14:hiddenLine>
             </a:ext>
             <a:ext uri="{FAA26D3D-D897-4be2-8F04-BA451C77F1D7}">
-              <ma14:placeholderFlag xmlns="" xmlns:ma14="http://schemas.microsoft.com/office/mac/drawingml/2011/main" val="1"/>
+              <ma14:placeholderFlag xmlns:ma14="http://schemas.microsoft.com/office/mac/drawingml/2011/main" xmlns="" val="1"/>
             </a:ext>
           </a:extLst>
         </p:spPr>
@@ -6195,7 +6196,7 @@
               <a:pPr>
                 <a:defRPr/>
               </a:pPr>
-              <a:t>8/13/25</a:t>
+              <a:t>8/19/25</a:t>
             </a:fld>
             <a:endParaRPr lang="en-US" dirty="0"/>
           </a:p>
@@ -6916,6 +6917,151 @@
         </p:nvSpPr>
         <p:spPr>
           <a:xfrm>
+            <a:off x="609601" y="2280746"/>
+            <a:ext cx="4436962" cy="3845418"/>
+          </a:xfrm>
+        </p:spPr>
+        <p:txBody>
+          <a:bodyPr>
+            <a:normAutofit fontScale="77500" lnSpcReduction="20000"/>
+          </a:bodyPr>
+          <a:lstStyle/>
+          <a:p>
+            <a:r>
+              <a:rPr lang="en-US" dirty="0"/>
+              <a:t>Several generations of reactors can be distinguished</a:t>
+            </a:r>
+          </a:p>
+          <a:p>
+            <a:r>
+              <a:rPr lang="en-US" dirty="0"/>
+              <a:t>Generation I reactors were developed in 1950-60s, and are no longer operational</a:t>
+            </a:r>
+          </a:p>
+          <a:p>
+            <a:r>
+              <a:rPr lang="en-US" dirty="0"/>
+              <a:t>Generation II reactors are the present US and French fleets and most in operation elsewhere</a:t>
+            </a:r>
+          </a:p>
+          <a:p>
+            <a:pPr lvl="1"/>
+            <a:endParaRPr lang="en-US" dirty="0"/>
+          </a:p>
+        </p:txBody>
+      </p:sp>
+      <p:pic>
+        <p:nvPicPr>
+          <p:cNvPr id="4" name="Picture 3">
+            <a:extLst>
+              <a:ext uri="{FF2B5EF4-FFF2-40B4-BE49-F238E27FC236}">
+                <a16:creationId xmlns:a16="http://schemas.microsoft.com/office/drawing/2014/main" id="{946FE7B0-8C2C-E14A-9500-D4B0942C6546}"/>
+              </a:ext>
+            </a:extLst>
+          </p:cNvPr>
+          <p:cNvPicPr>
+            <a:picLocks noChangeAspect="1"/>
+          </p:cNvPicPr>
+          <p:nvPr/>
+        </p:nvPicPr>
+        <p:blipFill>
+          <a:blip r:embed="rId2" cstate="email">
+            <a:extLst>
+              <a:ext uri="{28A0092B-C50C-407E-A947-70E740481C1C}">
+                <a14:useLocalDpi xmlns:a14="http://schemas.microsoft.com/office/drawing/2010/main"/>
+              </a:ext>
+            </a:extLst>
+          </a:blip>
+          <a:stretch>
+            <a:fillRect/>
+          </a:stretch>
+        </p:blipFill>
+        <p:spPr>
+          <a:xfrm>
+            <a:off x="5206543" y="2093490"/>
+            <a:ext cx="6766222" cy="3697008"/>
+          </a:xfrm>
+          <a:prstGeom prst="rect">
+            <a:avLst/>
+          </a:prstGeom>
+        </p:spPr>
+      </p:pic>
+    </p:spTree>
+    <p:extLst>
+      <p:ext uri="{BB962C8B-B14F-4D97-AF65-F5344CB8AC3E}">
+        <p14:creationId xmlns:p14="http://schemas.microsoft.com/office/powerpoint/2010/main" val="485938955"/>
+      </p:ext>
+    </p:extLst>
+  </p:cSld>
+  <p:clrMapOvr>
+    <a:masterClrMapping/>
+  </p:clrMapOvr>
+</p:sld>
+</file>
+
+<file path=ppt/slides/slide11.xml><?xml version="1.0" encoding="utf-8"?>
+<p:sld xmlns:a="http://schemas.openxmlformats.org/drawingml/2006/main" xmlns:r="http://schemas.openxmlformats.org/officeDocument/2006/relationships" xmlns:p="http://schemas.openxmlformats.org/presentationml/2006/main">
+  <p:cSld>
+    <p:spTree>
+      <p:nvGrpSpPr>
+        <p:cNvPr id="1" name=""/>
+        <p:cNvGrpSpPr/>
+        <p:nvPr/>
+      </p:nvGrpSpPr>
+      <p:grpSpPr>
+        <a:xfrm>
+          <a:off x="0" y="0"/>
+          <a:ext cx="0" cy="0"/>
+          <a:chOff x="0" y="0"/>
+          <a:chExt cx="0" cy="0"/>
+        </a:xfrm>
+      </p:grpSpPr>
+      <p:sp>
+        <p:nvSpPr>
+          <p:cNvPr id="2" name="Title 1">
+            <a:extLst>
+              <a:ext uri="{FF2B5EF4-FFF2-40B4-BE49-F238E27FC236}">
+                <a16:creationId xmlns:a16="http://schemas.microsoft.com/office/drawing/2014/main" id="{04AA9092-1496-1F4F-8649-05DBBD65563F}"/>
+              </a:ext>
+            </a:extLst>
+          </p:cNvPr>
+          <p:cNvSpPr>
+            <a:spLocks noGrp="1"/>
+          </p:cNvSpPr>
+          <p:nvPr>
+            <p:ph type="title"/>
+          </p:nvPr>
+        </p:nvSpPr>
+        <p:spPr/>
+        <p:txBody>
+          <a:bodyPr/>
+          <a:lstStyle/>
+          <a:p>
+            <a:r>
+              <a:rPr lang="en-US" dirty="0"/>
+              <a:t>What do I mean by advanced reactors?</a:t>
+            </a:r>
+          </a:p>
+        </p:txBody>
+      </p:sp>
+      <p:sp>
+        <p:nvSpPr>
+          <p:cNvPr id="3" name="Content Placeholder 2">
+            <a:extLst>
+              <a:ext uri="{FF2B5EF4-FFF2-40B4-BE49-F238E27FC236}">
+                <a16:creationId xmlns:a16="http://schemas.microsoft.com/office/drawing/2014/main" id="{E91DE69F-6DDA-474F-B5E8-1F8602846B07}"/>
+              </a:ext>
+            </a:extLst>
+          </p:cNvPr>
+          <p:cNvSpPr>
+            <a:spLocks noGrp="1"/>
+          </p:cNvSpPr>
+          <p:nvPr>
+            <p:ph idx="1"/>
+          </p:nvPr>
+        </p:nvSpPr>
+        <p:spPr>
+          <a:xfrm>
             <a:off x="609600" y="2280746"/>
             <a:ext cx="10733590" cy="3845418"/>
           </a:xfrm>
@@ -6935,21 +7081,21 @@
             <a:pPr lvl="1"/>
             <a:r>
               <a:rPr lang="en-US" sz="2900" dirty="0"/>
-              <a:t>A more standardized design for each type to expedite licensing, reduce capital cost and reduce construction time.</a:t>
+              <a:t>A more standardized design for each type to expedite licensing, reduce capital cost and reduce construction time</a:t>
             </a:r>
           </a:p>
           <a:p>
             <a:pPr lvl="1"/>
             <a:r>
               <a:rPr lang="en-US" sz="2900" dirty="0"/>
-              <a:t>A simpler and more rugged design, making them easier to operate and less vulnerable to operational upsets.</a:t>
+              <a:t>A simpler and more rugged design, making them easier to operate and less vulnerable to operational upsets</a:t>
             </a:r>
           </a:p>
           <a:p>
             <a:pPr lvl="1"/>
             <a:r>
               <a:rPr lang="en-US" sz="2900" dirty="0"/>
-              <a:t>Higher availability and longer operating life – typically 60 years.</a:t>
+              <a:t>Higher availability and longer operating life – typically 60 years</a:t>
             </a:r>
           </a:p>
           <a:p>
@@ -6970,7 +7116,7 @@
             <a:pPr lvl="1"/>
             <a:r>
               <a:rPr lang="en-US" sz="2900" dirty="0"/>
-              <a:t>Higher burn-up to use fuel more fully and efficiently and reduce the amount of waste.</a:t>
+              <a:t>Higher burn-up to use fuel more fully and efficiently and reduce the amount of waste</a:t>
             </a:r>
           </a:p>
           <a:p>
@@ -6999,7 +7145,7 @@
 </p:sld>
 </file>
 
-<file path=ppt/slides/slide11.xml><?xml version="1.0" encoding="utf-8"?>
+<file path=ppt/slides/slide12.xml><?xml version="1.0" encoding="utf-8"?>
 <p:sld xmlns:a="http://schemas.openxmlformats.org/drawingml/2006/main" xmlns:r="http://schemas.openxmlformats.org/officeDocument/2006/relationships" xmlns:p="http://schemas.openxmlformats.org/presentationml/2006/main">
   <p:cSld>
     <p:spTree>
@@ -7140,7 +7286,7 @@
 </p:sld>
 </file>
 
-<file path=ppt/slides/slide12.xml><?xml version="1.0" encoding="utf-8"?>
+<file path=ppt/slides/slide13.xml><?xml version="1.0" encoding="utf-8"?>
 <p:sld xmlns:a="http://schemas.openxmlformats.org/drawingml/2006/main" xmlns:r="http://schemas.openxmlformats.org/officeDocument/2006/relationships" xmlns:p="http://schemas.openxmlformats.org/presentationml/2006/main">
   <p:cSld>
     <p:spTree>
@@ -7229,7 +7375,7 @@
             <a:pPr lvl="1"/>
             <a:r>
               <a:rPr lang="en-US" sz="2900" dirty="0"/>
-              <a:t>typically incorporates six reactor designs</a:t>
+              <a:t>typically incorporates five-seven reactor designs</a:t>
             </a:r>
           </a:p>
           <a:p>
@@ -7250,7 +7396,7 @@
             <a:pPr lvl="1"/>
             <a:r>
               <a:rPr lang="en-US" sz="2900" dirty="0"/>
-              <a:t>all six systems represent advances in sustainability, economics, safety, reliability, and proliferation-resistance</a:t>
+              <a:t>all systems represent advances in sustainability, economics, safety, reliability, and proliferation-resistance</a:t>
             </a:r>
           </a:p>
           <a:p>
@@ -7308,7 +7454,7 @@
 </p:sld>
 </file>
 
-<file path=ppt/slides/slide13.xml><?xml version="1.0" encoding="utf-8"?>
+<file path=ppt/slides/slide14.xml><?xml version="1.0" encoding="utf-8"?>
 <p:sld xmlns:a="http://schemas.openxmlformats.org/drawingml/2006/main" xmlns:r="http://schemas.openxmlformats.org/officeDocument/2006/relationships" xmlns:p="http://schemas.openxmlformats.org/presentationml/2006/main">
   <p:cSld>
     <p:spTree>
@@ -7348,7 +7494,7 @@
           <a:p>
             <a:r>
               <a:rPr lang="en-US" dirty="0"/>
-              <a:t>Selected Advanced Reactor Designs</a:t>
+              <a:t>Selected Advanced* Reactor Designs</a:t>
             </a:r>
           </a:p>
         </p:txBody>
@@ -7432,7 +7578,51 @@
           <a:p>
             <a:r>
               <a:rPr lang="en-US" sz="2400" dirty="0"/>
-              <a:t>Can consult the Advanced Reactors Information System (ARIS) from the IAEA for more information</a:t>
+              <a:t>Can consult the Advanced Reactors Information System (ARIS) from the IAEA for more information: https://</a:t>
+            </a:r>
+            <a:r>
+              <a:rPr lang="en-US" sz="2400" dirty="0" err="1"/>
+              <a:t>aris.iaea.org</a:t>
+            </a:r>
+            <a:r>
+              <a:rPr lang="en-US" sz="2400" dirty="0"/>
+              <a:t>/</a:t>
+            </a:r>
+          </a:p>
+        </p:txBody>
+      </p:sp>
+      <p:sp>
+        <p:nvSpPr>
+          <p:cNvPr id="4" name="TextBox 3">
+            <a:extLst>
+              <a:ext uri="{FF2B5EF4-FFF2-40B4-BE49-F238E27FC236}">
+                <a16:creationId xmlns:a16="http://schemas.microsoft.com/office/drawing/2014/main" id="{0DDA52FB-C2A0-378D-AD12-F8E627566E0A}"/>
+              </a:ext>
+            </a:extLst>
+          </p:cNvPr>
+          <p:cNvSpPr txBox="1"/>
+          <p:nvPr/>
+        </p:nvSpPr>
+        <p:spPr>
+          <a:xfrm>
+            <a:off x="3184634" y="5773221"/>
+            <a:ext cx="5822731" cy="369332"/>
+          </a:xfrm>
+          <a:prstGeom prst="rect">
+            <a:avLst/>
+          </a:prstGeom>
+          <a:noFill/>
+        </p:spPr>
+        <p:txBody>
+          <a:bodyPr wrap="square" rtlCol="0">
+            <a:spAutoFit/>
+          </a:bodyPr>
+          <a:lstStyle/>
+          <a:p>
+            <a:pPr algn="ctr"/>
+            <a:r>
+              <a:rPr lang="en-US" dirty="0"/>
+              <a:t>*Have included some Gen III here…</a:t>
             </a:r>
           </a:p>
         </p:txBody>
@@ -7450,7 +7640,7 @@
 </p:sld>
 </file>
 
-<file path=ppt/slides/slide14.xml><?xml version="1.0" encoding="utf-8"?>
+<file path=ppt/slides/slide15.xml><?xml version="1.0" encoding="utf-8"?>
 <p:sld xmlns:a="http://schemas.openxmlformats.org/drawingml/2006/main" xmlns:r="http://schemas.openxmlformats.org/officeDocument/2006/relationships" xmlns:p="http://schemas.openxmlformats.org/presentationml/2006/main">
   <p:cSld>
     <p:spTree>
@@ -7672,7 +7862,7 @@
 </p:sld>
 </file>
 
-<file path=ppt/slides/slide15.xml><?xml version="1.0" encoding="utf-8"?>
+<file path=ppt/slides/slide16.xml><?xml version="1.0" encoding="utf-8"?>
 <p:sld xmlns:a="http://schemas.openxmlformats.org/drawingml/2006/main" xmlns:r="http://schemas.openxmlformats.org/officeDocument/2006/relationships" xmlns:p="http://schemas.openxmlformats.org/presentationml/2006/main">
   <p:cSld>
     <p:spTree>
@@ -7838,110 +8028,6 @@
 </p:sld>
 </file>
 
-<file path=ppt/slides/slide16.xml><?xml version="1.0" encoding="utf-8"?>
-<p:sld xmlns:a="http://schemas.openxmlformats.org/drawingml/2006/main" xmlns:r="http://schemas.openxmlformats.org/officeDocument/2006/relationships" xmlns:p="http://schemas.openxmlformats.org/presentationml/2006/main">
-  <p:cSld>
-    <p:spTree>
-      <p:nvGrpSpPr>
-        <p:cNvPr id="1" name=""/>
-        <p:cNvGrpSpPr/>
-        <p:nvPr/>
-      </p:nvGrpSpPr>
-      <p:grpSpPr>
-        <a:xfrm>
-          <a:off x="0" y="0"/>
-          <a:ext cx="0" cy="0"/>
-          <a:chOff x="0" y="0"/>
-          <a:chExt cx="0" cy="0"/>
-        </a:xfrm>
-      </p:grpSpPr>
-      <p:sp>
-        <p:nvSpPr>
-          <p:cNvPr id="2" name="Title 1">
-            <a:extLst>
-              <a:ext uri="{FF2B5EF4-FFF2-40B4-BE49-F238E27FC236}">
-                <a16:creationId xmlns:a16="http://schemas.microsoft.com/office/drawing/2014/main" id="{D77A9FF5-3AB3-2D22-C68C-3E00A56A77C6}"/>
-              </a:ext>
-            </a:extLst>
-          </p:cNvPr>
-          <p:cNvSpPr>
-            <a:spLocks noGrp="1"/>
-          </p:cNvSpPr>
-          <p:nvPr>
-            <p:ph type="title"/>
-          </p:nvPr>
-        </p:nvSpPr>
-        <p:spPr/>
-        <p:txBody>
-          <a:bodyPr/>
-          <a:lstStyle/>
-          <a:p>
-            <a:r>
-              <a:rPr lang="en-US" dirty="0"/>
-              <a:t>DOE Push for Advanced Reactors</a:t>
-            </a:r>
-          </a:p>
-        </p:txBody>
-      </p:sp>
-      <p:sp>
-        <p:nvSpPr>
-          <p:cNvPr id="3" name="Content Placeholder 2">
-            <a:extLst>
-              <a:ext uri="{FF2B5EF4-FFF2-40B4-BE49-F238E27FC236}">
-                <a16:creationId xmlns:a16="http://schemas.microsoft.com/office/drawing/2014/main" id="{1B3003FF-87BC-C330-610C-756228C3A68B}"/>
-              </a:ext>
-            </a:extLst>
-          </p:cNvPr>
-          <p:cNvSpPr>
-            <a:spLocks noGrp="1"/>
-          </p:cNvSpPr>
-          <p:nvPr>
-            <p:ph idx="1"/>
-          </p:nvPr>
-        </p:nvSpPr>
-        <p:spPr/>
-        <p:txBody>
-          <a:bodyPr/>
-          <a:lstStyle/>
-          <a:p>
-            <a:r>
-              <a:rPr lang="en-US" sz="2000" dirty="0"/>
-              <a:t>DOE is funding a lot of research into advanced reactor systems</a:t>
-            </a:r>
-          </a:p>
-          <a:p>
-            <a:r>
-              <a:rPr lang="en-US" sz="2000" dirty="0"/>
-              <a:t>The Advanced Reactor Demonstration Program (ARDP) seeks to rapidly develop advanced reactor concepts</a:t>
-            </a:r>
-          </a:p>
-          <a:p>
-            <a:r>
-              <a:rPr lang="en-US" sz="2000" dirty="0"/>
-              <a:t>The National Reactor Innovation Center (NRIC) supports the construction and demonstration of advanced reactor systems committed to demonstrating advanced reactors by the end of 2025</a:t>
-            </a:r>
-          </a:p>
-          <a:p>
-            <a:r>
-              <a:rPr lang="en-US" sz="2000" dirty="0"/>
-              <a:t>The Office of Advanced Reactor Technologies (ART) sponsors research, development and deployment (RD&amp;D) activities, with a focus on advancing scientific understanding of these technologies, establishing an international network of user facilities for civil nuclear RD&amp;D, improving economic competitiveness, and reducing the technical and regulatory uncertainties for deploying new nuclear reactor technologies</a:t>
-            </a:r>
-          </a:p>
-        </p:txBody>
-      </p:sp>
-    </p:spTree>
-    <p:extLst>
-      <p:ext uri="{BB962C8B-B14F-4D97-AF65-F5344CB8AC3E}">
-        <p14:creationId xmlns:p14="http://schemas.microsoft.com/office/powerpoint/2010/main" val="1397516009"/>
-      </p:ext>
-    </p:extLst>
-  </p:cSld>
-  <p:clrMapOvr>
-    <a:masterClrMapping/>
-  </p:clrMapOvr>
-</p:sld>
-</file>
-
 <file path=ppt/slides/slide17.xml><?xml version="1.0" encoding="utf-8"?>
 <p:sld xmlns:a="http://schemas.openxmlformats.org/drawingml/2006/main" xmlns:r="http://schemas.openxmlformats.org/officeDocument/2006/relationships" xmlns:p="http://schemas.openxmlformats.org/presentationml/2006/main">
   <p:cSld>
@@ -7964,7 +8050,7 @@
           <p:cNvPr id="2" name="Title 1">
             <a:extLst>
               <a:ext uri="{FF2B5EF4-FFF2-40B4-BE49-F238E27FC236}">
-                <a16:creationId xmlns:a16="http://schemas.microsoft.com/office/drawing/2014/main" id="{2606F7CE-DDB6-B748-8CFF-FA5C8F85571E}"/>
+                <a16:creationId xmlns:a16="http://schemas.microsoft.com/office/drawing/2014/main" id="{D77A9FF5-3AB3-2D22-C68C-3E00A56A77C6}"/>
               </a:ext>
             </a:extLst>
           </p:cNvPr>
@@ -7982,7 +8068,7 @@
           <a:p>
             <a:r>
               <a:rPr lang="en-US" dirty="0"/>
-              <a:t>Advanced Reactors in This Course</a:t>
+              <a:t>DOE Push for Advanced Reactors</a:t>
             </a:r>
           </a:p>
         </p:txBody>
@@ -7992,7 +8078,7 @@
           <p:cNvPr id="3" name="Content Placeholder 2">
             <a:extLst>
               <a:ext uri="{FF2B5EF4-FFF2-40B4-BE49-F238E27FC236}">
-                <a16:creationId xmlns:a16="http://schemas.microsoft.com/office/drawing/2014/main" id="{73CE51DF-1CEC-EC47-9534-E608A43727A8}"/>
+                <a16:creationId xmlns:a16="http://schemas.microsoft.com/office/drawing/2014/main" id="{1B3003FF-87BC-C330-610C-756228C3A68B}"/>
               </a:ext>
             </a:extLst>
           </p:cNvPr>
@@ -8003,85 +8089,40 @@
             <p:ph idx="1"/>
           </p:nvPr>
         </p:nvSpPr>
-        <p:spPr>
-          <a:xfrm>
-            <a:off x="609600" y="1968500"/>
-            <a:ext cx="10972800" cy="4157664"/>
-          </a:xfrm>
-        </p:spPr>
+        <p:spPr/>
         <p:txBody>
           <a:bodyPr/>
           <a:lstStyle/>
           <a:p>
             <a:r>
-              <a:rPr lang="en-US" sz="2400" dirty="0"/>
-              <a:t>Generation IV or adjacent concepts:</a:t>
-            </a:r>
-          </a:p>
-          <a:p>
-            <a:pPr lvl="1"/>
-            <a:r>
               <a:rPr lang="en-US" sz="2000" dirty="0"/>
-              <a:t>Sodium-cooled fast reactors</a:t>
-            </a:r>
-          </a:p>
-          <a:p>
-            <a:pPr lvl="1"/>
+              <a:t>DOE is funding a lot of research into advanced reactor systems</a:t>
+            </a:r>
+          </a:p>
+          <a:p>
             <a:r>
               <a:rPr lang="en-US" sz="2000" dirty="0"/>
-              <a:t>Molten salt reactors (both salt-cooled and salt-fueled)</a:t>
-            </a:r>
-          </a:p>
-          <a:p>
-            <a:pPr lvl="1"/>
+              <a:t>The Advanced Reactor Demonstration Program (ARDP) seeks to rapidly develop advanced reactor concepts</a:t>
+            </a:r>
+          </a:p>
+          <a:p>
             <a:r>
               <a:rPr lang="en-US" sz="2000" dirty="0"/>
-              <a:t>Gas-cooled reactors (both fast and thermal spectra)</a:t>
-            </a:r>
-          </a:p>
-          <a:p>
-            <a:pPr lvl="1"/>
+              <a:t>The National Reactor Innovation Center (NRIC) supports the construction and demonstration of advanced reactor systems committed to demonstrating advanced reactors by the end of 2025</a:t>
+            </a:r>
+          </a:p>
+          <a:p>
             <a:r>
               <a:rPr lang="en-US" sz="2000" dirty="0"/>
-              <a:t>Lead-cooled reactors</a:t>
-            </a:r>
-          </a:p>
-          <a:p>
-            <a:pPr lvl="1"/>
-            <a:r>
-              <a:rPr lang="en-US" sz="2000" dirty="0"/>
-              <a:t>Research reactors</a:t>
-            </a:r>
-          </a:p>
-          <a:p>
-            <a:pPr lvl="1"/>
-            <a:r>
-              <a:rPr lang="en-US" sz="2000" dirty="0"/>
-              <a:t>Supercritical water-cooled reactors (if we have time)</a:t>
-            </a:r>
-          </a:p>
-          <a:p>
-            <a:r>
-              <a:rPr lang="en-US" sz="2400" dirty="0"/>
-              <a:t>Many of these concepts overlap with SMRs</a:t>
-            </a:r>
-          </a:p>
-          <a:p>
-            <a:r>
-              <a:rPr lang="en-US" sz="2400" dirty="0"/>
-              <a:t>Will not touch on traditional UO2 fuel in LWRs, but touch on basically everything else</a:t>
-            </a:r>
-          </a:p>
-          <a:p>
-            <a:pPr lvl="1"/>
-            <a:endParaRPr lang="en-US" sz="2400" dirty="0"/>
+              <a:t>The Office of Advanced Reactor Technologies (ART) sponsors research, development and deployment (RD&amp;D) activities, with a focus on advancing scientific understanding of these technologies, establishing an international network of user facilities for civil nuclear RD&amp;D, improving economic competitiveness, and reducing the technical and regulatory uncertainties for deploying new nuclear reactor technologies</a:t>
+            </a:r>
           </a:p>
         </p:txBody>
       </p:sp>
     </p:spTree>
     <p:extLst>
       <p:ext uri="{BB962C8B-B14F-4D97-AF65-F5344CB8AC3E}">
-        <p14:creationId xmlns:p14="http://schemas.microsoft.com/office/powerpoint/2010/main" val="56968922"/>
+        <p14:creationId xmlns:p14="http://schemas.microsoft.com/office/powerpoint/2010/main" val="1397516009"/>
       </p:ext>
     </p:extLst>
   </p:cSld>
@@ -8113,7 +8154,7 @@
           <p:cNvPr id="2" name="Title 1">
             <a:extLst>
               <a:ext uri="{FF2B5EF4-FFF2-40B4-BE49-F238E27FC236}">
-                <a16:creationId xmlns:a16="http://schemas.microsoft.com/office/drawing/2014/main" id="{29297520-EFC3-6346-8C35-1817DC6451A3}"/>
+                <a16:creationId xmlns:a16="http://schemas.microsoft.com/office/drawing/2014/main" id="{2606F7CE-DDB6-B748-8CFF-FA5C8F85571E}"/>
               </a:ext>
             </a:extLst>
           </p:cNvPr>
@@ -8131,7 +8172,7 @@
           <a:p>
             <a:r>
               <a:rPr lang="en-US" dirty="0"/>
-              <a:t>Subject Matter</a:t>
+              <a:t>Advanced Reactors in This Course</a:t>
             </a:r>
           </a:p>
         </p:txBody>
@@ -8141,7 +8182,7 @@
           <p:cNvPr id="3" name="Content Placeholder 2">
             <a:extLst>
               <a:ext uri="{FF2B5EF4-FFF2-40B4-BE49-F238E27FC236}">
-                <a16:creationId xmlns:a16="http://schemas.microsoft.com/office/drawing/2014/main" id="{DD54E750-56FB-B64A-96F1-1A89BB30F130}"/>
+                <a16:creationId xmlns:a16="http://schemas.microsoft.com/office/drawing/2014/main" id="{73CE51DF-1CEC-EC47-9534-E608A43727A8}"/>
               </a:ext>
             </a:extLst>
           </p:cNvPr>
@@ -8152,36 +8193,85 @@
             <p:ph idx="1"/>
           </p:nvPr>
         </p:nvSpPr>
-        <p:spPr/>
-        <p:txBody>
-          <a:bodyPr>
-            <a:normAutofit/>
-          </a:bodyPr>
+        <p:spPr>
+          <a:xfrm>
+            <a:off x="609600" y="1968500"/>
+            <a:ext cx="10972800" cy="4157664"/>
+          </a:xfrm>
+        </p:spPr>
+        <p:txBody>
+          <a:bodyPr/>
           <a:lstStyle/>
           <a:p>
             <a:r>
               <a:rPr lang="en-US" sz="2400" dirty="0"/>
-              <a:t>Explore unique aspects of each reactor type</a:t>
+              <a:t>Generation IV or adjacent concepts:</a:t>
+            </a:r>
+          </a:p>
+          <a:p>
+            <a:pPr lvl="1"/>
+            <a:r>
+              <a:rPr lang="en-US" sz="2000" dirty="0"/>
+              <a:t>Sodium-cooled fast reactors</a:t>
+            </a:r>
+          </a:p>
+          <a:p>
+            <a:pPr lvl="1"/>
+            <a:r>
+              <a:rPr lang="en-US" sz="2000" dirty="0"/>
+              <a:t>Molten salt reactors (both salt-cooled and salt-fueled)</a:t>
+            </a:r>
+          </a:p>
+          <a:p>
+            <a:pPr lvl="1"/>
+            <a:r>
+              <a:rPr lang="en-US" sz="2000" dirty="0"/>
+              <a:t>Gas-cooled reactors</a:t>
+            </a:r>
+          </a:p>
+          <a:p>
+            <a:pPr lvl="1"/>
+            <a:r>
+              <a:rPr lang="en-US" sz="2000" dirty="0"/>
+              <a:t>Lead-cooled reactors</a:t>
+            </a:r>
+          </a:p>
+          <a:p>
+            <a:pPr lvl="1"/>
+            <a:r>
+              <a:rPr lang="en-US" sz="2000" dirty="0"/>
+              <a:t>Research reactors</a:t>
+            </a:r>
+          </a:p>
+          <a:p>
+            <a:pPr lvl="1"/>
+            <a:r>
+              <a:rPr lang="en-US" sz="2000" dirty="0"/>
+              <a:t>Supercritical water-cooled reactors (if we have time)</a:t>
             </a:r>
           </a:p>
           <a:p>
             <a:r>
               <a:rPr lang="en-US" sz="2400" dirty="0"/>
-              <a:t>Identify fuel and cladding materials relevant to each reactor design, with a general emphasis on fuels (but will still cover advanced cladding materials)</a:t>
-            </a:r>
-          </a:p>
-          <a:p>
-            <a:r>
-              <a:rPr lang="en-US" sz="2400" b="1" dirty="0"/>
-              <a:t>Explore materials challenges and materials phenomena impacting the performance, deployment, and lifetime of advanced reactors </a:t>
-            </a:r>
+              <a:t>Many of these concepts overlap with SMRs</a:t>
+            </a:r>
+          </a:p>
+          <a:p>
+            <a:r>
+              <a:rPr lang="en-US" sz="2400" dirty="0"/>
+              <a:t>Will not touch on traditional UO2 fuel in LWRs, but touch on basically everything else</a:t>
+            </a:r>
+          </a:p>
+          <a:p>
+            <a:pPr lvl="1"/>
+            <a:endParaRPr lang="en-US" sz="2400" dirty="0"/>
           </a:p>
         </p:txBody>
       </p:sp>
     </p:spTree>
     <p:extLst>
       <p:ext uri="{BB962C8B-B14F-4D97-AF65-F5344CB8AC3E}">
-        <p14:creationId xmlns:p14="http://schemas.microsoft.com/office/powerpoint/2010/main" val="3776802651"/>
+        <p14:creationId xmlns:p14="http://schemas.microsoft.com/office/powerpoint/2010/main" val="56968922"/>
       </p:ext>
     </p:extLst>
   </p:cSld>
@@ -8213,7 +8303,7 @@
           <p:cNvPr id="2" name="Title 1">
             <a:extLst>
               <a:ext uri="{FF2B5EF4-FFF2-40B4-BE49-F238E27FC236}">
-                <a16:creationId xmlns:a16="http://schemas.microsoft.com/office/drawing/2014/main" id="{93BFF56A-496A-2047-ADE5-CCF8BA98C8AD}"/>
+                <a16:creationId xmlns:a16="http://schemas.microsoft.com/office/drawing/2014/main" id="{29297520-EFC3-6346-8C35-1817DC6451A3}"/>
               </a:ext>
             </a:extLst>
           </p:cNvPr>
@@ -8231,7 +8321,49 @@
           <a:p>
             <a:r>
               <a:rPr lang="en-US" dirty="0"/>
-              <a:t>Questions?</a:t>
+              <a:t>Subject Matter</a:t>
+            </a:r>
+          </a:p>
+        </p:txBody>
+      </p:sp>
+      <p:sp>
+        <p:nvSpPr>
+          <p:cNvPr id="3" name="Content Placeholder 2">
+            <a:extLst>
+              <a:ext uri="{FF2B5EF4-FFF2-40B4-BE49-F238E27FC236}">
+                <a16:creationId xmlns:a16="http://schemas.microsoft.com/office/drawing/2014/main" id="{DD54E750-56FB-B64A-96F1-1A89BB30F130}"/>
+              </a:ext>
+            </a:extLst>
+          </p:cNvPr>
+          <p:cNvSpPr>
+            <a:spLocks noGrp="1"/>
+          </p:cNvSpPr>
+          <p:nvPr>
+            <p:ph idx="1"/>
+          </p:nvPr>
+        </p:nvSpPr>
+        <p:spPr/>
+        <p:txBody>
+          <a:bodyPr>
+            <a:normAutofit/>
+          </a:bodyPr>
+          <a:lstStyle/>
+          <a:p>
+            <a:r>
+              <a:rPr lang="en-US" sz="2400" dirty="0"/>
+              <a:t>Explore unique aspects of each reactor type</a:t>
+            </a:r>
+          </a:p>
+          <a:p>
+            <a:r>
+              <a:rPr lang="en-US" sz="2400" dirty="0"/>
+              <a:t>Identify fuel and cladding materials relevant to each reactor design, with a general emphasis on fuels, but will still cover advanced cladding materials and related materials phenomena</a:t>
+            </a:r>
+          </a:p>
+          <a:p>
+            <a:r>
+              <a:rPr lang="en-US" sz="2400" b="1" dirty="0"/>
+              <a:t>Explore materials challenges and materials phenomena impacting the performance, deployment, and lifetime of advanced reactors </a:t>
             </a:r>
           </a:p>
         </p:txBody>
@@ -8239,7 +8371,7 @@
     </p:spTree>
     <p:extLst>
       <p:ext uri="{BB962C8B-B14F-4D97-AF65-F5344CB8AC3E}">
-        <p14:creationId xmlns:p14="http://schemas.microsoft.com/office/powerpoint/2010/main" val="2867231162"/>
+        <p14:creationId xmlns:p14="http://schemas.microsoft.com/office/powerpoint/2010/main" val="3776802651"/>
       </p:ext>
     </p:extLst>
   </p:cSld>
@@ -8362,6 +8494,64 @@
     <p:extLst>
       <p:ext uri="{BB962C8B-B14F-4D97-AF65-F5344CB8AC3E}">
         <p14:creationId xmlns:p14="http://schemas.microsoft.com/office/powerpoint/2010/main" val="2231084047"/>
+      </p:ext>
+    </p:extLst>
+  </p:cSld>
+  <p:clrMapOvr>
+    <a:masterClrMapping/>
+  </p:clrMapOvr>
+</p:sld>
+</file>
+
+<file path=ppt/slides/slide20.xml><?xml version="1.0" encoding="utf-8"?>
+<p:sld xmlns:a="http://schemas.openxmlformats.org/drawingml/2006/main" xmlns:r="http://schemas.openxmlformats.org/officeDocument/2006/relationships" xmlns:p="http://schemas.openxmlformats.org/presentationml/2006/main">
+  <p:cSld>
+    <p:spTree>
+      <p:nvGrpSpPr>
+        <p:cNvPr id="1" name=""/>
+        <p:cNvGrpSpPr/>
+        <p:nvPr/>
+      </p:nvGrpSpPr>
+      <p:grpSpPr>
+        <a:xfrm>
+          <a:off x="0" y="0"/>
+          <a:ext cx="0" cy="0"/>
+          <a:chOff x="0" y="0"/>
+          <a:chExt cx="0" cy="0"/>
+        </a:xfrm>
+      </p:grpSpPr>
+      <p:sp>
+        <p:nvSpPr>
+          <p:cNvPr id="2" name="Title 1">
+            <a:extLst>
+              <a:ext uri="{FF2B5EF4-FFF2-40B4-BE49-F238E27FC236}">
+                <a16:creationId xmlns:a16="http://schemas.microsoft.com/office/drawing/2014/main" id="{93BFF56A-496A-2047-ADE5-CCF8BA98C8AD}"/>
+              </a:ext>
+            </a:extLst>
+          </p:cNvPr>
+          <p:cNvSpPr>
+            <a:spLocks noGrp="1"/>
+          </p:cNvSpPr>
+          <p:nvPr>
+            <p:ph type="title"/>
+          </p:nvPr>
+        </p:nvSpPr>
+        <p:spPr/>
+        <p:txBody>
+          <a:bodyPr/>
+          <a:lstStyle/>
+          <a:p>
+            <a:r>
+              <a:rPr lang="en-US" dirty="0"/>
+              <a:t>Questions?</a:t>
+            </a:r>
+          </a:p>
+        </p:txBody>
+      </p:sp>
+    </p:spTree>
+    <p:extLst>
+      <p:ext uri="{BB962C8B-B14F-4D97-AF65-F5344CB8AC3E}">
+        <p14:creationId xmlns:p14="http://schemas.microsoft.com/office/powerpoint/2010/main" val="2867231162"/>
       </p:ext>
     </p:extLst>
   </p:cSld>
@@ -8969,7 +9159,7 @@
               </a14:hiddenLine>
             </a:ext>
             <a:ext uri="{FAA26D3D-D897-4be2-8F04-BA451C77F1D7}">
-              <ma14:placeholderFlag xmlns="" xmlns:ma14="http://schemas.microsoft.com/office/mac/drawingml/2011/main" val="1"/>
+              <ma14:placeholderFlag xmlns:ma14="http://schemas.microsoft.com/office/mac/drawingml/2011/main" xmlns="" val="1"/>
             </a:ext>
           </a:extLst>
         </p:spPr>
@@ -9234,7 +9424,7 @@
           <p:cNvPr id="2" name="Title 1">
             <a:extLst>
               <a:ext uri="{FF2B5EF4-FFF2-40B4-BE49-F238E27FC236}">
-                <a16:creationId xmlns:a16="http://schemas.microsoft.com/office/drawing/2014/main" id="{297947CF-EAEA-5F40-93E5-30922295C42A}"/>
+                <a16:creationId xmlns:a16="http://schemas.microsoft.com/office/drawing/2014/main" id="{3583A3F6-41BD-538B-92D5-A86ADA315123}"/>
               </a:ext>
             </a:extLst>
           </p:cNvPr>
@@ -9252,7 +9442,41 @@
           <a:p>
             <a:r>
               <a:rPr lang="en-US" dirty="0"/>
-              <a:t>Advanced reactor systems</a:t>
+              <a:t>Resources</a:t>
+            </a:r>
+          </a:p>
+        </p:txBody>
+      </p:sp>
+      <p:sp>
+        <p:nvSpPr>
+          <p:cNvPr id="3" name="Content Placeholder 2">
+            <a:extLst>
+              <a:ext uri="{FF2B5EF4-FFF2-40B4-BE49-F238E27FC236}">
+                <a16:creationId xmlns:a16="http://schemas.microsoft.com/office/drawing/2014/main" id="{147EEF4F-D98B-BACD-4C29-5D5BF1DFAB20}"/>
+              </a:ext>
+            </a:extLst>
+          </p:cNvPr>
+          <p:cNvSpPr>
+            <a:spLocks noGrp="1"/>
+          </p:cNvSpPr>
+          <p:nvPr>
+            <p:ph idx="1"/>
+          </p:nvPr>
+        </p:nvSpPr>
+        <p:spPr/>
+        <p:txBody>
+          <a:bodyPr/>
+          <a:lstStyle/>
+          <a:p>
+            <a:r>
+              <a:rPr lang="en-US" dirty="0"/>
+              <a:t>No official textbook</a:t>
+            </a:r>
+          </a:p>
+          <a:p>
+            <a:r>
+              <a:rPr lang="en-US" dirty="0"/>
+              <a:t>I pull a lot of material from “Comprehensive Nuclear Materials”</a:t>
             </a:r>
           </a:p>
         </p:txBody>
@@ -9260,7 +9484,7 @@
     </p:spTree>
     <p:extLst>
       <p:ext uri="{BB962C8B-B14F-4D97-AF65-F5344CB8AC3E}">
-        <p14:creationId xmlns:p14="http://schemas.microsoft.com/office/powerpoint/2010/main" val="2813437046"/>
+        <p14:creationId xmlns:p14="http://schemas.microsoft.com/office/powerpoint/2010/main" val="136036706"/>
       </p:ext>
     </p:extLst>
   </p:cSld>
@@ -9292,7 +9516,7 @@
           <p:cNvPr id="2" name="Title 1">
             <a:extLst>
               <a:ext uri="{FF2B5EF4-FFF2-40B4-BE49-F238E27FC236}">
-                <a16:creationId xmlns:a16="http://schemas.microsoft.com/office/drawing/2014/main" id="{04AA9092-1496-1F4F-8649-05DBBD65563F}"/>
+                <a16:creationId xmlns:a16="http://schemas.microsoft.com/office/drawing/2014/main" id="{297947CF-EAEA-5F40-93E5-30922295C42A}"/>
               </a:ext>
             </a:extLst>
           </p:cNvPr>
@@ -9310,102 +9534,15 @@
           <a:p>
             <a:r>
               <a:rPr lang="en-US" dirty="0"/>
-              <a:t>What do I mean by advanced reactors?</a:t>
-            </a:r>
-          </a:p>
-        </p:txBody>
-      </p:sp>
-      <p:sp>
-        <p:nvSpPr>
-          <p:cNvPr id="3" name="Content Placeholder 2">
-            <a:extLst>
-              <a:ext uri="{FF2B5EF4-FFF2-40B4-BE49-F238E27FC236}">
-                <a16:creationId xmlns:a16="http://schemas.microsoft.com/office/drawing/2014/main" id="{E91DE69F-6DDA-474F-B5E8-1F8602846B07}"/>
-              </a:ext>
-            </a:extLst>
-          </p:cNvPr>
-          <p:cNvSpPr>
-            <a:spLocks noGrp="1"/>
-          </p:cNvSpPr>
-          <p:nvPr>
-            <p:ph idx="1"/>
-          </p:nvPr>
-        </p:nvSpPr>
-        <p:spPr>
-          <a:xfrm>
-            <a:off x="609601" y="2280746"/>
-            <a:ext cx="4436962" cy="3845418"/>
-          </a:xfrm>
-        </p:spPr>
-        <p:txBody>
-          <a:bodyPr>
-            <a:normAutofit fontScale="77500" lnSpcReduction="20000"/>
-          </a:bodyPr>
-          <a:lstStyle/>
-          <a:p>
-            <a:r>
-              <a:rPr lang="en-US" dirty="0"/>
-              <a:t>Several generations of reactors can be distinguished</a:t>
-            </a:r>
-          </a:p>
-          <a:p>
-            <a:r>
-              <a:rPr lang="en-US" dirty="0"/>
-              <a:t>Generation I reactors were developed in 1950-60s, and are no longer operational</a:t>
-            </a:r>
-          </a:p>
-          <a:p>
-            <a:r>
-              <a:rPr lang="en-US" dirty="0"/>
-              <a:t>Generation II reactors are the present US and French fleets and most in operation elsewhere</a:t>
-            </a:r>
-          </a:p>
-          <a:p>
-            <a:pPr lvl="1"/>
-            <a:endParaRPr lang="en-US" dirty="0"/>
-          </a:p>
-        </p:txBody>
-      </p:sp>
-      <p:pic>
-        <p:nvPicPr>
-          <p:cNvPr id="4" name="Picture 3">
-            <a:extLst>
-              <a:ext uri="{FF2B5EF4-FFF2-40B4-BE49-F238E27FC236}">
-                <a16:creationId xmlns:a16="http://schemas.microsoft.com/office/drawing/2014/main" id="{946FE7B0-8C2C-E14A-9500-D4B0942C6546}"/>
-              </a:ext>
-            </a:extLst>
-          </p:cNvPr>
-          <p:cNvPicPr>
-            <a:picLocks noChangeAspect="1"/>
-          </p:cNvPicPr>
-          <p:nvPr/>
-        </p:nvPicPr>
-        <p:blipFill>
-          <a:blip r:embed="rId2" cstate="email">
-            <a:extLst>
-              <a:ext uri="{28A0092B-C50C-407E-A947-70E740481C1C}">
-                <a14:useLocalDpi xmlns:a14="http://schemas.microsoft.com/office/drawing/2010/main"/>
-              </a:ext>
-            </a:extLst>
-          </a:blip>
-          <a:stretch>
-            <a:fillRect/>
-          </a:stretch>
-        </p:blipFill>
-        <p:spPr>
-          <a:xfrm>
-            <a:off x="5206543" y="2093490"/>
-            <a:ext cx="6766222" cy="3697008"/>
-          </a:xfrm>
-          <a:prstGeom prst="rect">
-            <a:avLst/>
-          </a:prstGeom>
-        </p:spPr>
-      </p:pic>
+              <a:t>Advanced reactor systems</a:t>
+            </a:r>
+          </a:p>
+        </p:txBody>
+      </p:sp>
     </p:spTree>
     <p:extLst>
       <p:ext uri="{BB962C8B-B14F-4D97-AF65-F5344CB8AC3E}">
-        <p14:creationId xmlns:p14="http://schemas.microsoft.com/office/powerpoint/2010/main" val="485938955"/>
+        <p14:creationId xmlns:p14="http://schemas.microsoft.com/office/powerpoint/2010/main" val="2813437046"/>
       </p:ext>
     </p:extLst>
   </p:cSld>
